--- a/entrega/QGate.pptx
+++ b/entrega/QGate.pptx
@@ -789,7 +789,7 @@
           <a:lstStyle/>
           <a:p>
             <a:r>
-              <a:t>Simular el problema completo exige 100 qubits: imposible. QGate usa siempre piezas de 9. Elegimos lambda con un criterio analítico y lo validamos con un barrido. Medimos el ruido: con 1% el mixer XY pierde casi toda su ventaja de factibilidad. Todo es simulador.</a:t>
+              <a:t>Simular el problema completo exige 100 qubits: imposible. QGate usa siempre piezas de 9. Elegimos lambda con un criterio analítico y lo validamos con un barrido. Medimos el ruido: con 1% el mixer XY pierde casi toda su ventaja de factibilidad. Además corrimos N=3 una vez en ibm_kingston de IBM Quantum: con mixer XY salieron 25% de asignaciones válidas, frente a 79% ideal y 22% al azar.</a:t>
             </a:r>
           </a:p>
         </p:txBody>
@@ -999,7 +999,7 @@
           <a:lstStyle/>
           <a:p>
             <a:r>
-              <a:t>Hoy lo cuántico aporta estructura y concentración de probabilidad en piezas pequeñas, no velocidad en simulador, y lo mostramos con números. El siguiente paso es hardware IBM real, piezas más grandes y mitigación de errores. Gracias.</a:t>
+              <a:t>Hoy lo cuántico aporta estructura y concentración de probabilidad en piezas pequeñas, no velocidad en simulador, y lo mostramos con números. Lo medimos en el simulador Qiskit Aer y en una corrida en ibm_kingston de IBM Quantum. El siguiente paso es más tiempo de hardware, piezas más grandes y mitigación de errores. Gracias.</a:t>
             </a:r>
           </a:p>
         </p:txBody>

--- a/entrega/QGate.pptx
+++ b/entrega/QGate.pptx
@@ -999,7 +999,7 @@
           <a:lstStyle/>
           <a:p>
             <a:r>
-              <a:t>Hoy lo cuántico aporta estructura y concentración de probabilidad en piezas pequeñas, no velocidad en simulador, y lo mostramos con números. Lo medimos en el simulador Qiskit Aer y en una corrida en ibm_kingston de IBM Quantum. El siguiente paso es más tiempo de hardware, piezas más grandes y mitigación de errores. Gracias.</a:t>
+              <a:t>Hoy lo cuántico aporta estructura y concentración de probabilidad en piezas pequeñas, no velocidad en simulador, y lo mostramos con números. Lo medimos en el simulador Qiskit Aer y en una corrida en ibm_kingston de IBM Quantum. El siguiente paso es más tiempo de hardware, piezas más grandes y mitigación de errores. Gracias. Desarrollado con asistencia de Claude Code (Anthropic), supervisada por el equipo; parte del motor se preparó antes de la jornada; los cuatro integrantes pueden explicar su funcionamiento.</a:t>
             </a:r>
           </a:p>
         </p:txBody>

--- a/entrega/QGate.pptx
+++ b/entrega/QGate.pptx
@@ -859,7 +859,7 @@
           <a:lstStyle/>
           <a:p>
             <a:r>
-              <a:t>QGate elige 3 vuelos, arma una pieza de 9 qubits con el resto fijo y la resuelve con QAOA. Con nuestra semilla llega a 340. Con 512 muestras hasta el azar resuelve piezas tan chicas, por eso medimos con 8: QAOA resuelve 59% de las piezas y el azar 29%. En 12 semillas llega a 340 en 4: el límite es la búsqueda.</a:t>
+              <a:t>QGate elige 3 vuelos, arma una pieza de 9 qubits con el resto fijo y la resuelve con QAOA. Con nuestra semilla llega a 340. Con 512 muestras hasta el azar resuelve piezas tan chicas, por eso medimos con 8: QAOA resuelve 59% de las piezas y el azar sobre los 27 estados de su espacio 29%. Pero el azar sobre las 6 permutaciones válidas llegaría a 78% y enumerar las 6 opciones, a 100%: QAOA concentra probabilidad respecto a su espacio de partida, pero en piezas de 3 vuelos aún no supera a esas alternativas. En 12 semillas llega a 340 en 4: el límite es la búsqueda.</a:t>
             </a:r>
           </a:p>
         </p:txBody>

--- a/entrega/QGate.pptx
+++ b/entrega/QGate.pptx
@@ -859,7 +859,7 @@
           <a:lstStyle/>
           <a:p>
             <a:r>
-              <a:t>QGate elige 3 vuelos, arma una pieza de 9 qubits con el resto fijo y la resuelve con QAOA. Con nuestra semilla llega a 340. Con 512 muestras hasta el azar resuelve piezas tan chicas, por eso medimos con 8: QAOA resuelve 59% de las piezas y el azar sobre los 27 estados de su espacio 29%. Pero el azar sobre las 6 permutaciones válidas llegaría a 78% y enumerar las 6 opciones, a 100%: QAOA concentra probabilidad respecto a su espacio de partida, pero en piezas de 3 vuelos aún no supera a esas alternativas. En 12 semillas llega a 340 en 4: el límite es la búsqueda.</a:t>
+              <a:t>QGate elige 3 vuelos, arma una pieza de 9 qubits con el resto fijo y la resuelve con QAOA. Con nuestra semilla llega a 340. Con 512 muestras hasta el azar resuelve piezas tan chicas, por eso medimos con 8: QAOA resuelve 59% de las piezas y el azar sobre los 27 estados de su espacio 29%. Pero el azar sobre las 6 permutaciones válidas llegaría a 78% y enumerar las 6 opciones, a 100%: QAOA concentra probabilidad respecto a su espacio de partida, pero en piezas de 3 vuelos aún no supera a esas alternativas. Con el solver exacto en cada vecindario, 4 de 12 semillas llegan a 340; el QAOA lo corrimos con la semilla 7: el límite es la búsqueda.</a:t>
             </a:r>
           </a:p>
         </p:txBody>

--- a/entrega/QGate.pptx
+++ b/entrega/QGate.pptx
@@ -929,7 +929,7 @@
           <a:lstStyle/>
           <a:p>
             <a:r>
-              <a:t>Al crecer hasta N=16 la parte cuántica sigue en 9 qubits y la memoria no crece. Sin óptimo conocido medimos contra una cota inferior. Lo decimos claro: en simulador, simulated annealing gana en calidad y tiempo.</a:t>
+              <a:t>Para la final medimos N de 10 a 20 con 10 semillas y el mismo presupuesto para todos. La memoria cuántica no crece: siempre 9 qubits. La calidad todavía no escala: la tabla muestra la mediana y el rango entre semillas de SA y del híbrido con QAOA, cuánto de la reducción de costo vino de los bloques QAOA y qué fracción del tiempo se fue en QAOA.</a:t>
             </a:r>
           </a:p>
         </p:txBody>
